--- a/Topic_E/Exam_Practice/TE-L04_Writing_Workshop_Customs_Etiquette_and_Hospitality.pptx
+++ b/Topic_E/Exam_Practice/TE-L04_Writing_Workshop_Customs_Etiquette_and_Hospitality.pptx
@@ -784,7 +784,11 @@
           <a:lstStyle/>
           <a:p>
             <a:r>
-              <a:rPr lang="en-US" dirty="0"/>
+              <a:rPr lang="ar-SA" dirty="0">
+                <a:latin typeface="Amiri" pitchFamily="2" charset="-78"/>
+                <a:ea typeface="Amiri" pitchFamily="2" charset="-78"/>
+                <a:cs typeface="Amiri" pitchFamily="2" charset="-78"/>
+              </a:rPr>
               <a:t>Q3 (3 min to choose and read). Title (أ) suits Core and Develop; title (ب) suits Stretch.</a:t>
             </a:r>
             <a:endParaRPr lang="en-US" dirty="0"/>
@@ -1403,7 +1407,11 @@
           <a:lstStyle/>
           <a:p>
             <a:r>
-              <a:rPr lang="en-US" dirty="0"/>
+              <a:rPr lang="ar-SA" dirty="0">
+                <a:latin typeface="Amiri" pitchFamily="2" charset="-78"/>
+                <a:ea typeface="Amiri" pitchFamily="2" charset="-78"/>
+                <a:cs typeface="Amiri" pitchFamily="2" charset="-78"/>
+              </a:rPr>
               <a:t>WELCOME (1 min) — while students join.
 • Greet each student by name as they arrive: السَّلَامُ عَلَيْكُمْ. Take the register (Pastoral Tracker: attendance 0/1).
 • 2-MINUTE CHECK-IN (SEND training): a private chat to any student who seemed unsettled last lesson — “Are you okay today? 👍 / 👎”.
@@ -1936,7 +1944,11 @@
           <a:lstStyle/>
           <a:p>
             <a:r>
-              <a:rPr lang="en-US" dirty="0"/>
+              <a:rPr lang="ar-SA" dirty="0">
+                <a:latin typeface="Amiri" pitchFamily="2" charset="-78"/>
+                <a:ea typeface="Amiri" pitchFamily="2" charset="-78"/>
+                <a:cs typeface="Amiri" pitchFamily="2" charset="-78"/>
+              </a:rPr>
               <a:t>Question words: اُنْصُحِيهَا (advise her! — imperative) · قَارِنِي (compare!) · سَتَفْعَلَانِ (you two will do — FUTURE dual) · اسْأَلِيهَا (ask her!).</a:t>
             </a:r>
             <a:endParaRPr lang="en-US" dirty="0"/>
@@ -2508,6 +2520,7 @@
                   <a:srgbClr val="D4AF37"/>
                 </a:solidFill>
                 <a:latin typeface="Amiri" pitchFamily="2" charset="-78"/>
+                <a:ea typeface="Amiri" pitchFamily="2" charset="-78"/>
                 <a:cs typeface="Amiri" pitchFamily="2" charset="-78"/>
               </a:rPr>
               <a:t>م</a:t>
@@ -2714,6 +2727,7 @@
                   <a:srgbClr val="D4AF37"/>
                 </a:solidFill>
                 <a:latin typeface="Amiri" pitchFamily="2" charset="-78"/>
+                <a:ea typeface="Amiri" pitchFamily="2" charset="-78"/>
                 <a:cs typeface="Amiri" pitchFamily="2" charset="-78"/>
               </a:rPr>
               <a:t>وَرْشَةُ الكِتَابَةِ — العَادَاتُ وَآدَابُ الضِّيَافَةِ</a:t>
@@ -3171,6 +3185,7 @@
                   <a:srgbClr val="D4AF37"/>
                 </a:solidFill>
                 <a:latin typeface="Amiri" pitchFamily="2" charset="-78"/>
+                <a:ea typeface="Amiri" pitchFamily="2" charset="-78"/>
                 <a:cs typeface="Amiri" pitchFamily="2" charset="-78"/>
               </a:rPr>
               <a:t>م</a:t>
@@ -3491,6 +3506,7 @@
                   <a:srgbClr val="8A6D1E"/>
                 </a:solidFill>
                 <a:latin typeface="Amiri" pitchFamily="2" charset="-78"/>
+                <a:ea typeface="Amiri" pitchFamily="2" charset="-78"/>
                 <a:cs typeface="Amiri" pitchFamily="2" charset="-78"/>
               </a:rPr>
               <a:t>نَمُوذَجُ الإِجَابَةِ</a:t>
@@ -3604,6 +3620,7 @@
                   <a:srgbClr val="1F2A37"/>
                 </a:solidFill>
                 <a:latin typeface="Amiri" pitchFamily="2" charset="-78"/>
+                <a:ea typeface="Amiri" pitchFamily="2" charset="-78"/>
                 <a:cs typeface="Amiri" pitchFamily="2" charset="-78"/>
               </a:rPr>
               <a:t>مَرْحَبًا يَا هَانَا،</a:t>
@@ -3623,6 +3640,7 @@
                   <a:srgbClr val="1F2A37"/>
                 </a:solidFill>
                 <a:latin typeface="Amiri" pitchFamily="2" charset="-78"/>
+                <a:ea typeface="Amiri" pitchFamily="2" charset="-78"/>
                 <a:cs typeface="Amiri" pitchFamily="2" charset="-78"/>
               </a:rPr>
               <a:t>كَيْفَ حَالُكِ؟ أَنَا سَعِيدَةٌ جِدًّا، لِأَنَّكِ سَتَزُورِينَ بَيْتَ جَدِّي فِي عَمَّانَ مَعَنَا فِي الصَّيْفِ! جَدِّي وَجَدَّتِي كَرِيمَانِ جِدًّا، وَهُمَا يُحِبَّانِ الضُّيُوفَ. هٰذِهِ بَعْضُ النَّصَائِحِ: اِخْلَعِي حِذَاءَكِ عِنْدَ البَابِ، وَكُلِي بِيَدِكِ اليُمْنَى. لَا تَرْفُضِي القَهْوَةَ، وَقُولِي "سُفْرَةٌ دَائِمَةٌ" بَعْدَ الأَكْلِ. فِي الأُرْدُنِّ يَأْكُلُ النَّاسُ أَكْثَرَ مِنْ هُنَا، لِذٰلِكَ لَا تَأْكُلِي كَثِيرًا قَبْلَ الزِّيَارَةِ! أَظُنُّ أَنَّ الضِّيَافَةَ هُنَاكَ أَجْمَلُ، لِأَنَّهَا دَافِئَةٌ جِدًّا. سَنَطْبُخُ المَنْسَفَ مَعًا. هَلْ عِنْدَكِ أَسْئِلَةٌ؟</a:t>
@@ -3642,6 +3660,7 @@
                   <a:srgbClr val="1F2A37"/>
                 </a:solidFill>
                 <a:latin typeface="Amiri" pitchFamily="2" charset="-78"/>
+                <a:ea typeface="Amiri" pitchFamily="2" charset="-78"/>
                 <a:cs typeface="Amiri" pitchFamily="2" charset="-78"/>
               </a:rPr>
               <a:t>مَعَ السَّلَامَةِ،</a:t>
@@ -3661,6 +3680,7 @@
                   <a:srgbClr val="1F2A37"/>
                 </a:solidFill>
                 <a:latin typeface="Amiri" pitchFamily="2" charset="-78"/>
+                <a:ea typeface="Amiri" pitchFamily="2" charset="-78"/>
                 <a:cs typeface="Amiri" pitchFamily="2" charset="-78"/>
               </a:rPr>
               <a:t>أَمِينَةُ</a:t>
@@ -3824,11 +3844,12 @@
               <a:buNone/>
             </a:pPr>
             <a:r>
-              <a:rPr lang="en-US" sz="950" b="1" dirty="0">
+              <a:rPr lang="ar-SA" sz="950" b="1" dirty="0">
                 <a:solidFill>
                   <a:srgbClr val="FFFFFF"/>
                 </a:solidFill>
                 <a:latin typeface="Calibri" pitchFamily="34" charset="0"/>
+                <a:ea typeface="Amiri" pitchFamily="2" charset="-78"/>
                 <a:cs typeface="Amiri" pitchFamily="2" charset="-78"/>
               </a:rPr>
               <a:t>اِخْلَعِي حِذَاءَكِ</a:t>
@@ -3889,11 +3910,12 @@
               <a:buNone/>
             </a:pPr>
             <a:r>
-              <a:rPr lang="en-US" sz="950" b="1" dirty="0">
+              <a:rPr lang="ar-SA" sz="950" b="1" dirty="0">
                 <a:solidFill>
                   <a:srgbClr val="FFFFFF"/>
                 </a:solidFill>
                 <a:latin typeface="Calibri" pitchFamily="34" charset="0"/>
+                <a:ea typeface="Amiri" pitchFamily="2" charset="-78"/>
                 <a:cs typeface="Amiri" pitchFamily="2" charset="-78"/>
               </a:rPr>
               <a:t>لَا تَرْفُضِي</a:t>
@@ -3954,11 +3976,12 @@
               <a:buNone/>
             </a:pPr>
             <a:r>
-              <a:rPr lang="en-US" sz="950" b="1" dirty="0">
+              <a:rPr lang="ar-SA" sz="950" b="1" dirty="0">
                 <a:solidFill>
                   <a:srgbClr val="FFFFFF"/>
                 </a:solidFill>
                 <a:latin typeface="Calibri" pitchFamily="34" charset="0"/>
+                <a:ea typeface="Amiri" pitchFamily="2" charset="-78"/>
                 <a:cs typeface="Amiri" pitchFamily="2" charset="-78"/>
               </a:rPr>
               <a:t>أَكْثَرَ مِنْ هُنَا</a:t>
@@ -4019,11 +4042,12 @@
               <a:buNone/>
             </a:pPr>
             <a:r>
-              <a:rPr lang="en-US" sz="950" b="1" dirty="0">
+              <a:rPr lang="ar-SA" sz="950" b="1" dirty="0">
                 <a:solidFill>
                   <a:srgbClr val="FFFFFF"/>
                 </a:solidFill>
                 <a:latin typeface="Calibri" pitchFamily="34" charset="0"/>
+                <a:ea typeface="Amiri" pitchFamily="2" charset="-78"/>
                 <a:cs typeface="Amiri" pitchFamily="2" charset="-78"/>
               </a:rPr>
               <a:t>لَا تَأْكُلِي كَثِيرًا</a:t>
@@ -4157,6 +4181,7 @@
                   <a:srgbClr val="D4AF37"/>
                 </a:solidFill>
                 <a:latin typeface="Amiri" pitchFamily="2" charset="-78"/>
+                <a:ea typeface="Amiri" pitchFamily="2" charset="-78"/>
                 <a:cs typeface="Amiri" pitchFamily="2" charset="-78"/>
               </a:rPr>
               <a:t>م</a:t>
@@ -4477,6 +4502,7 @@
                   <a:srgbClr val="8A6D1E"/>
                 </a:solidFill>
                 <a:latin typeface="Amiri" pitchFamily="2" charset="-78"/>
+                <a:ea typeface="Amiri" pitchFamily="2" charset="-78"/>
                 <a:cs typeface="Amiri" pitchFamily="2" charset="-78"/>
               </a:rPr>
               <a:t>نَمُوذَجُ الإِجَابَةِ</a:t>
@@ -4590,6 +4616,7 @@
                   <a:srgbClr val="1F2A37"/>
                 </a:solidFill>
                 <a:latin typeface="Amiri" pitchFamily="2" charset="-78"/>
+                <a:ea typeface="Amiri" pitchFamily="2" charset="-78"/>
                 <a:cs typeface="Amiri" pitchFamily="2" charset="-78"/>
               </a:rPr>
               <a:t>عَزِيزَتِي هَانَا،</a:t>
@@ -4609,6 +4636,7 @@
                   <a:srgbClr val="1F2A37"/>
                 </a:solidFill>
                 <a:latin typeface="Amiri" pitchFamily="2" charset="-78"/>
+                <a:ea typeface="Amiri" pitchFamily="2" charset="-78"/>
                 <a:cs typeface="Amiri" pitchFamily="2" charset="-78"/>
               </a:rPr>
               <a:t>مَا أَجْمَلَ خَبَرَ زِيَارَتِكِ لِبَيْتِ جَدِّي فِي عَمَّانَ هٰذَا الصَّيْفَ! وَلِأَنَّ عَادَاتِ الضِّيَافَةِ هُنَاكَ تَخْتَلِفُ عَنْ عَادَاتِكُمْ، إِلَيْكِ بَعْضَ النَّصَائِحِ. اِخْلَعِي حِذَاءَكِ عِنْدَ البَابِ، وَصَافِحِي جَدَّتِي أَوَّلًا، فَهِيَ الأَكْبَرُ سِنًّا. وَإِذَا قَدَّمُوا لَكِ القَهْوَةَ، فَاقْبَلِيهَا بِيَدِكِ اليُمْنَى، وَهُزِّي الفِنْجَانَ عِنْدَمَا تَكْتَفِينَ. أَمَّا الطَّعَامُ، فَلَا تَقُولِي "لَا، شُكْرًا" مِنَ المَرَّةِ الأُولَى، لِأَنَّهُمْ سَيُصِرُّونَ ثَلَاثَ مَرَّاتٍ عَلَى الأَقَلِّ! صَحِيحٌ أَنَّ هٰذَا قَدْ يَبْدُو غَرِيبًا، غَيْرَ أَنَّ الضِّيَافَةَ عِنْدَنَا أَكْثَرُ دِفْئًا وَأَقَلُّ رَسْمِيَّةً مِمَّا تَعَوَّدْتِ عَلَيْهِ. وَإِذَا أَرَدْتِ، فَسَأُعَلِّمُكِ عِبَارَاتِ المُجَامَلَةِ قَبْلَ السَّفَرِ. مَا رَأْيُكِ؟</a:t>
@@ -4628,6 +4656,7 @@
                   <a:srgbClr val="1F2A37"/>
                 </a:solidFill>
                 <a:latin typeface="Amiri" pitchFamily="2" charset="-78"/>
+                <a:ea typeface="Amiri" pitchFamily="2" charset="-78"/>
                 <a:cs typeface="Amiri" pitchFamily="2" charset="-78"/>
               </a:rPr>
               <a:t>بِمَحَبَّةٍ،</a:t>
@@ -4647,6 +4676,7 @@
                   <a:srgbClr val="1F2A37"/>
                 </a:solidFill>
                 <a:latin typeface="Amiri" pitchFamily="2" charset="-78"/>
+                <a:ea typeface="Amiri" pitchFamily="2" charset="-78"/>
                 <a:cs typeface="Amiri" pitchFamily="2" charset="-78"/>
               </a:rPr>
               <a:t>أَمِينَةُ</a:t>
@@ -4810,11 +4840,12 @@
               <a:buNone/>
             </a:pPr>
             <a:r>
-              <a:rPr lang="en-US" sz="950" b="1" dirty="0">
+              <a:rPr lang="ar-SA" sz="950" b="1" dirty="0">
                 <a:solidFill>
                   <a:srgbClr val="FFFFFF"/>
                 </a:solidFill>
                 <a:latin typeface="Calibri" pitchFamily="34" charset="0"/>
+                <a:ea typeface="Amiri" pitchFamily="2" charset="-78"/>
                 <a:cs typeface="Amiri" pitchFamily="2" charset="-78"/>
               </a:rPr>
               <a:t>مَا أَجْمَلَ</a:t>
@@ -4875,11 +4906,12 @@
               <a:buNone/>
             </a:pPr>
             <a:r>
-              <a:rPr lang="en-US" sz="950" b="1" dirty="0">
+              <a:rPr lang="ar-SA" sz="950" b="1" dirty="0">
                 <a:solidFill>
                   <a:srgbClr val="FFFFFF"/>
                 </a:solidFill>
                 <a:latin typeface="Calibri" pitchFamily="34" charset="0"/>
+                <a:ea typeface="Amiri" pitchFamily="2" charset="-78"/>
                 <a:cs typeface="Amiri" pitchFamily="2" charset="-78"/>
               </a:rPr>
               <a:t>إِلَيْكِ بَعْضَ النَّصَائِحِ</a:t>
@@ -4940,11 +4972,12 @@
               <a:buNone/>
             </a:pPr>
             <a:r>
-              <a:rPr lang="en-US" sz="950" b="1" dirty="0">
+              <a:rPr lang="ar-SA" sz="950" b="1" dirty="0">
                 <a:solidFill>
                   <a:srgbClr val="FFFFFF"/>
                 </a:solidFill>
                 <a:latin typeface="Calibri" pitchFamily="34" charset="0"/>
+                <a:ea typeface="Amiri" pitchFamily="2" charset="-78"/>
                 <a:cs typeface="Amiri" pitchFamily="2" charset="-78"/>
               </a:rPr>
               <a:t>إِذَا قَدَّمُوا … فَاقْبَلِيهَا</a:t>
@@ -5005,11 +5038,12 @@
               <a:buNone/>
             </a:pPr>
             <a:r>
-              <a:rPr lang="en-US" sz="950" b="1" dirty="0">
+              <a:rPr lang="ar-SA" sz="950" b="1" dirty="0">
                 <a:solidFill>
                   <a:srgbClr val="FFFFFF"/>
                 </a:solidFill>
                 <a:latin typeface="Calibri" pitchFamily="34" charset="0"/>
+                <a:ea typeface="Amiri" pitchFamily="2" charset="-78"/>
                 <a:cs typeface="Amiri" pitchFamily="2" charset="-78"/>
               </a:rPr>
               <a:t>أَكْثَرُ دِفْئًا وَأَقَلُّ رَسْمِيَّةً</a:t>
@@ -5143,6 +5177,7 @@
                   <a:srgbClr val="D4AF37"/>
                 </a:solidFill>
                 <a:latin typeface="Amiri" pitchFamily="2" charset="-78"/>
+                <a:ea typeface="Amiri" pitchFamily="2" charset="-78"/>
                 <a:cs typeface="Amiri" pitchFamily="2" charset="-78"/>
               </a:rPr>
               <a:t>م</a:t>
@@ -5463,6 +5498,7 @@
                   <a:srgbClr val="8A6D1E"/>
                 </a:solidFill>
                 <a:latin typeface="Amiri" pitchFamily="2" charset="-78"/>
+                <a:ea typeface="Amiri" pitchFamily="2" charset="-78"/>
                 <a:cs typeface="Amiri" pitchFamily="2" charset="-78"/>
               </a:rPr>
               <a:t>اخْتَرْ عُنْوَانًا وَاحِدًا</a:t>
@@ -5743,6 +5779,7 @@
                   <a:srgbClr val="1B3B6F"/>
                 </a:solidFill>
                 <a:latin typeface="Amiri" pitchFamily="2" charset="-78"/>
+                <a:ea typeface="Amiri" pitchFamily="2" charset="-78"/>
                 <a:cs typeface="Amiri" pitchFamily="2" charset="-78"/>
               </a:rPr>
               <a:t>الضِّيَافَةُ فِي ثَقَافَتِي</a:t>
@@ -5781,6 +5818,7 @@
                   <a:srgbClr val="1B3B6F"/>
                 </a:solidFill>
                 <a:latin typeface="Amiri" pitchFamily="2" charset="-78"/>
+                <a:ea typeface="Amiri" pitchFamily="2" charset="-78"/>
                 <a:cs typeface="Amiri" pitchFamily="2" charset="-78"/>
               </a:rPr>
               <a:t>(أ)</a:t>
@@ -5887,6 +5925,7 @@
                   <a:srgbClr val="1B3B6F"/>
                 </a:solidFill>
                 <a:latin typeface="Amiri" pitchFamily="2" charset="-78"/>
+                <a:ea typeface="Amiri" pitchFamily="2" charset="-78"/>
                 <a:cs typeface="Amiri" pitchFamily="2" charset="-78"/>
               </a:rPr>
               <a:t>كَيْفَ تَسْتَقْبِلُونَ الضُّيُوفَ · عَادَاتُ البَيْتِ وَالطَّعَامِ · مُقَارَنَةٌ بِثَقَافَةٍ أُخْرَى · نَصَائِحُ لِلضَّيْفِ وَخُطَطُكَ</a:t>
@@ -6018,6 +6057,7 @@
                   <a:srgbClr val="1B3B6F"/>
                 </a:solidFill>
                 <a:latin typeface="Amiri" pitchFamily="2" charset="-78"/>
+                <a:ea typeface="Amiri" pitchFamily="2" charset="-78"/>
                 <a:cs typeface="Amiri" pitchFamily="2" charset="-78"/>
               </a:rPr>
               <a:t>هَلْ مَا زَالَتْ آدَابُ الضِّيَافَةِ التَّقْلِيدِيَّةُ مُهِمَّةً؟</a:t>
@@ -6056,6 +6096,7 @@
                   <a:srgbClr val="1B3B6F"/>
                 </a:solidFill>
                 <a:latin typeface="Amiri" pitchFamily="2" charset="-78"/>
+                <a:ea typeface="Amiri" pitchFamily="2" charset="-78"/>
                 <a:cs typeface="Amiri" pitchFamily="2" charset="-78"/>
               </a:rPr>
               <a:t>(ب)</a:t>
@@ -6159,6 +6200,7 @@
                   <a:srgbClr val="1B3B6F"/>
                 </a:solidFill>
                 <a:latin typeface="Amiri" pitchFamily="2" charset="-78"/>
+                <a:ea typeface="Amiri" pitchFamily="2" charset="-78"/>
                 <a:cs typeface="Amiri" pitchFamily="2" charset="-78"/>
               </a:rPr>
               <a:t>المَوْضُوعُ · الصُّعُوبَاتُ اليَوْمَ وَجَوْهَرُ الضِّيَافَةِ · مِثَالٌ مِنْ تَجْرِبَتِكَ · رَأْيُكَ</a:t>
@@ -6358,6 +6400,7 @@
                   <a:srgbClr val="D4AF37"/>
                 </a:solidFill>
                 <a:latin typeface="Amiri" pitchFamily="2" charset="-78"/>
+                <a:ea typeface="Amiri" pitchFamily="2" charset="-78"/>
                 <a:cs typeface="Amiri" pitchFamily="2" charset="-78"/>
               </a:rPr>
               <a:t>م</a:t>
@@ -6678,6 +6721,7 @@
                   <a:srgbClr val="8A6D1E"/>
                 </a:solidFill>
                 <a:latin typeface="Amiri" pitchFamily="2" charset="-78"/>
+                <a:ea typeface="Amiri" pitchFamily="2" charset="-78"/>
                 <a:cs typeface="Amiri" pitchFamily="2" charset="-78"/>
               </a:rPr>
               <a:t>خُطَّةُ الكِتَابَةِ</a:t>
@@ -7302,6 +7346,7 @@
                   <a:srgbClr val="1B3B6F"/>
                 </a:solidFill>
                 <a:latin typeface="Amiri" pitchFamily="2" charset="-78"/>
+                <a:ea typeface="Amiri" pitchFamily="2" charset="-78"/>
                 <a:cs typeface="Amiri" pitchFamily="2" charset="-78"/>
               </a:rPr>
               <a:t>نُرَحِّبُ بِالضَّيْفِ، ثُمَّ نُقَدِّمُ القَهْوَةَ.</a:t>
@@ -7401,6 +7446,7 @@
                   <a:srgbClr val="1B3B6F"/>
                 </a:solidFill>
                 <a:latin typeface="Amiri" pitchFamily="2" charset="-78"/>
+                <a:ea typeface="Amiri" pitchFamily="2" charset="-78"/>
                 <a:cs typeface="Amiri" pitchFamily="2" charset="-78"/>
               </a:rPr>
               <a:t>الزِّيَارَاتُ هُنَا أَقْصَرُ مِنْ زِيَارَاتِنَا.</a:t>
@@ -7500,6 +7546,7 @@
                   <a:srgbClr val="1B3B6F"/>
                 </a:solidFill>
                 <a:latin typeface="Amiri" pitchFamily="2" charset="-78"/>
+                <a:ea typeface="Amiri" pitchFamily="2" charset="-78"/>
                 <a:cs typeface="Amiri" pitchFamily="2" charset="-78"/>
               </a:rPr>
               <a:t>اِمْدَحِ الطَّعَامَ، وَلَا تَرْفُضِ القَهْوَةَ.</a:t>
@@ -7661,6 +7708,7 @@
                   <a:srgbClr val="1F2A37"/>
                 </a:solidFill>
                 <a:latin typeface="Amiri" pitchFamily="2" charset="-78"/>
+                <a:ea typeface="Amiri" pitchFamily="2" charset="-78"/>
                 <a:cs typeface="Amiri" pitchFamily="2" charset="-78"/>
               </a:rPr>
               <a:t>أ</a:t>
@@ -7687,6 +7735,7 @@
                   <a:srgbClr val="1F2A37"/>
                 </a:solidFill>
                 <a:latin typeface="Amiri" pitchFamily="2" charset="-78"/>
+                <a:ea typeface="Amiri" pitchFamily="2" charset="-78"/>
                 <a:cs typeface="Amiri" pitchFamily="2" charset="-78"/>
               </a:rPr>
               <a:t>ب</a:t>
@@ -7833,6 +7882,7 @@
                   <a:srgbClr val="D4AF37"/>
                 </a:solidFill>
                 <a:latin typeface="Amiri" pitchFamily="2" charset="-78"/>
+                <a:ea typeface="Amiri" pitchFamily="2" charset="-78"/>
                 <a:cs typeface="Amiri" pitchFamily="2" charset="-78"/>
               </a:rPr>
               <a:t>م</a:t>
@@ -8090,6 +8140,7 @@
                   <a:srgbClr val="8A6D1E"/>
                 </a:solidFill>
                 <a:latin typeface="Amiri" pitchFamily="2" charset="-78"/>
+                <a:ea typeface="Amiri" pitchFamily="2" charset="-78"/>
                 <a:cs typeface="Amiri" pitchFamily="2" charset="-78"/>
               </a:rPr>
               <a:t>أ</a:t>
@@ -8154,6 +8205,7 @@
                   <a:srgbClr val="1B3B6F"/>
                 </a:solidFill>
                 <a:latin typeface="Amiri" pitchFamily="2" charset="-78"/>
+                <a:ea typeface="Amiri" pitchFamily="2" charset="-78"/>
                 <a:cs typeface="Amiri" pitchFamily="2" charset="-78"/>
               </a:rPr>
               <a:t>أ</a:t>
@@ -8205,6 +8257,7 @@
                   <a:srgbClr val="8A6D1E"/>
                 </a:solidFill>
                 <a:latin typeface="Amiri" pitchFamily="2" charset="-78"/>
+                <a:ea typeface="Amiri" pitchFamily="2" charset="-78"/>
                 <a:cs typeface="Amiri" pitchFamily="2" charset="-78"/>
               </a:rPr>
               <a:t>نَمُوذَجُ الإِجَابَةِ</a:t>
@@ -8318,6 +8371,7 @@
                   <a:srgbClr val="1F2A37"/>
                 </a:solidFill>
                 <a:latin typeface="Amiri" pitchFamily="2" charset="-78"/>
+                <a:ea typeface="Amiri" pitchFamily="2" charset="-78"/>
                 <a:cs typeface="Amiri" pitchFamily="2" charset="-78"/>
               </a:rPr>
               <a:t>فِي ثَقَافَتِي العَرَبِيَّةِ، الضَّيْفُ مُهِمٌّ جِدًّا. عِنْدَمَا يَزُورُنَا ضَيْفٌ، نُرَحِّبُ بِهِ بِحَرَارَةٍ وَنَقُولُ: "أَهْلًا وَسَهْلًا، تَفَضَّلْ". ثُمَّ نُقَدِّمُ لَهُ القَهْوَةَ العَرَبِيَّةَ وَالتَّمْرَ، وَبَعْدَ ذٰلِكَ الطَّعَامَ.</a:t>
@@ -8337,6 +8391,7 @@
                   <a:srgbClr val="1F2A37"/>
                 </a:solidFill>
                 <a:latin typeface="Amiri" pitchFamily="2" charset="-78"/>
+                <a:ea typeface="Amiri" pitchFamily="2" charset="-78"/>
                 <a:cs typeface="Amiri" pitchFamily="2" charset="-78"/>
               </a:rPr>
               <a:t>فِي بَيْتِ جَدِّي فِي عَمَّانَ، نَجْلِسُ عَلَى الأَرْضِ وَنَأْكُلُ المَنْسَفَ مَعًا. جَدَّتِي تَطْبُخُ كَثِيرًا جِدًّا، لِأَنَّهَا تَقُولُ إِنَّ الطَّعَامَ القَلِيلَ عَيْبٌ. نَخْلَعُ الأَحْذِيَةَ عِنْدَ البَابِ، وَنَأْكُلُ بِاليَدِ اليُمْنَى، وَهٰذَا مِنَ الأَدَبِ.</a:t>
@@ -8356,6 +8411,7 @@
                   <a:srgbClr val="1F2A37"/>
                 </a:solidFill>
                 <a:latin typeface="Amiri" pitchFamily="2" charset="-78"/>
+                <a:ea typeface="Amiri" pitchFamily="2" charset="-78"/>
                 <a:cs typeface="Amiri" pitchFamily="2" charset="-78"/>
               </a:rPr>
               <a:t>فِي بَرِيطَانْيَا، الضِّيَافَةُ مُخْتَلِفَةٌ. هُنَا يَتَّصِلُ النَّاسُ قَبْلَ الزِّيَارَةِ، وَالزِّيَارَاتُ أَقْصَرُ مِنْ زِيَارَاتِنَا. أَظُنُّ أَنَّ الضِّيَافَةَ العَرَبِيَّةَ أَكْثَرُ دِفْئًا، لٰكِنَّ الضِّيَافَةَ البَرِيطَانِيَّةَ أَكْثَرُ تَنْظِيمًا. فِي السَّنَةِ المَاضِيَةِ زَارَتْنَا صَدِيقَتِي الإِنْجْلِيزِيَّةُ، وَأَحَبَّتْ طَعَامَنَا كَثِيرًا، وَطَلَبَتْ وَصْفَةَ المَنْسَفِ مِنْ أُمِّي.</a:t>
@@ -8375,6 +8431,7 @@
                   <a:srgbClr val="1F2A37"/>
                 </a:solidFill>
                 <a:latin typeface="Amiri" pitchFamily="2" charset="-78"/>
+                <a:ea typeface="Amiri" pitchFamily="2" charset="-78"/>
                 <a:cs typeface="Amiri" pitchFamily="2" charset="-78"/>
               </a:rPr>
               <a:t>نَصِيحَتِي لِأَيِّ ضَيْفٍ: اِمْدَحِ الطَّعَامَ، وَلَا تَرْفُضِ القَهْوَةَ. فِي المُسْتَقْبَلِ سَأَسْتَقْبِلُ ضُيُوفِي مِثْلَ جَدِّي، لِأَنَّ الكَرَمَ جُزْءٌ مِنْ هُوِيَّتِي.</a:t>
@@ -8538,11 +8595,12 @@
               <a:buNone/>
             </a:pPr>
             <a:r>
-              <a:rPr lang="en-US" sz="950" b="1" dirty="0">
+              <a:rPr lang="ar-SA" sz="950" b="1" dirty="0">
                 <a:solidFill>
                   <a:srgbClr val="FFFFFF"/>
                 </a:solidFill>
                 <a:latin typeface="Calibri" pitchFamily="34" charset="0"/>
+                <a:ea typeface="Amiri" pitchFamily="2" charset="-78"/>
                 <a:cs typeface="Amiri" pitchFamily="2" charset="-78"/>
               </a:rPr>
               <a:t>نُرَحِّبُ بِهِ</a:t>
@@ -8603,11 +8661,12 @@
               <a:buNone/>
             </a:pPr>
             <a:r>
-              <a:rPr lang="en-US" sz="950" b="1" dirty="0">
+              <a:rPr lang="ar-SA" sz="950" b="1" dirty="0">
                 <a:solidFill>
                   <a:srgbClr val="FFFFFF"/>
                 </a:solidFill>
                 <a:latin typeface="Calibri" pitchFamily="34" charset="0"/>
+                <a:ea typeface="Amiri" pitchFamily="2" charset="-78"/>
                 <a:cs typeface="Amiri" pitchFamily="2" charset="-78"/>
               </a:rPr>
               <a:t>أَقْصَرُ مِنْ</a:t>
@@ -8668,11 +8727,12 @@
               <a:buNone/>
             </a:pPr>
             <a:r>
-              <a:rPr lang="en-US" sz="950" b="1" dirty="0">
+              <a:rPr lang="ar-SA" sz="950" b="1" dirty="0">
                 <a:solidFill>
                   <a:srgbClr val="FFFFFF"/>
                 </a:solidFill>
                 <a:latin typeface="Calibri" pitchFamily="34" charset="0"/>
+                <a:ea typeface="Amiri" pitchFamily="2" charset="-78"/>
                 <a:cs typeface="Amiri" pitchFamily="2" charset="-78"/>
               </a:rPr>
               <a:t>أَكْثَرُ دِفْئًا</a:t>
@@ -8733,11 +8793,12 @@
               <a:buNone/>
             </a:pPr>
             <a:r>
-              <a:rPr lang="en-US" sz="950" b="1" dirty="0">
+              <a:rPr lang="ar-SA" sz="950" b="1" dirty="0">
                 <a:solidFill>
                   <a:srgbClr val="FFFFFF"/>
                 </a:solidFill>
                 <a:latin typeface="Calibri" pitchFamily="34" charset="0"/>
+                <a:ea typeface="Amiri" pitchFamily="2" charset="-78"/>
                 <a:cs typeface="Amiri" pitchFamily="2" charset="-78"/>
               </a:rPr>
               <a:t>لَا تَرْفُضِ القَهْوَةَ</a:t>
@@ -8871,6 +8932,7 @@
                   <a:srgbClr val="D4AF37"/>
                 </a:solidFill>
                 <a:latin typeface="Amiri" pitchFamily="2" charset="-78"/>
+                <a:ea typeface="Amiri" pitchFamily="2" charset="-78"/>
                 <a:cs typeface="Amiri" pitchFamily="2" charset="-78"/>
               </a:rPr>
               <a:t>م</a:t>
@@ -9128,6 +9190,7 @@
                   <a:srgbClr val="8A6D1E"/>
                 </a:solidFill>
                 <a:latin typeface="Amiri" pitchFamily="2" charset="-78"/>
+                <a:ea typeface="Amiri" pitchFamily="2" charset="-78"/>
                 <a:cs typeface="Amiri" pitchFamily="2" charset="-78"/>
               </a:rPr>
               <a:t>أ</a:t>
@@ -9192,6 +9255,7 @@
                   <a:srgbClr val="1B3B6F"/>
                 </a:solidFill>
                 <a:latin typeface="Amiri" pitchFamily="2" charset="-78"/>
+                <a:ea typeface="Amiri" pitchFamily="2" charset="-78"/>
                 <a:cs typeface="Amiri" pitchFamily="2" charset="-78"/>
               </a:rPr>
               <a:t>أ</a:t>
@@ -9243,6 +9307,7 @@
                   <a:srgbClr val="8A6D1E"/>
                 </a:solidFill>
                 <a:latin typeface="Amiri" pitchFamily="2" charset="-78"/>
+                <a:ea typeface="Amiri" pitchFamily="2" charset="-78"/>
                 <a:cs typeface="Amiri" pitchFamily="2" charset="-78"/>
               </a:rPr>
               <a:t>نَمُوذَجُ الإِجَابَةِ</a:t>
@@ -9356,6 +9421,7 @@
                   <a:srgbClr val="1F2A37"/>
                 </a:solidFill>
                 <a:latin typeface="Amiri" pitchFamily="2" charset="-78"/>
+                <a:ea typeface="Amiri" pitchFamily="2" charset="-78"/>
                 <a:cs typeface="Amiri" pitchFamily="2" charset="-78"/>
               </a:rPr>
               <a:t>يَقُولُ جَدِّي دَائِمًا: "الضَّيْفُ إِذَا دَخَلَ بَيْتَنَا صَارَ صَاحِبَهُ". وَقَدْ فَهِمْتُ مَعْنَى هٰذِهِ الجُمْلَةِ حِينَ رَأَيْتُهُ يُعْطِي غُرْفَتَهُ لِضَيْفٍ غَرِيبٍ، وَيَنَامُ هُوَ فِي الصَّالَةِ عَلَى فِرَاشٍ بَسِيطٍ!</a:t>
@@ -9375,6 +9441,7 @@
                   <a:srgbClr val="1F2A37"/>
                 </a:solidFill>
                 <a:latin typeface="Amiri" pitchFamily="2" charset="-78"/>
+                <a:ea typeface="Amiri" pitchFamily="2" charset="-78"/>
                 <a:cs typeface="Amiri" pitchFamily="2" charset="-78"/>
               </a:rPr>
               <a:t>فَالضِّيَافَةُ فِي ثَقَافَتِنَا لَيْسَتْ مُجَرَّدَ طَعَامٍ، بَلْ هِيَ مَجْمُوعَةٌ مِنَ الآدَابِ: أَنْ تُرَحِّبَ بِالضَّيْفِ قَبْلَ أَنْ يَطْرُقَ البَابَ، وَأَنْ تُقَدِّمَ لَهُ القَهْوَةَ بِيَمِينِكَ، وَأَلَّا تَسْأَلَهُ عَنْ سَبَبِ زِيَارَتِهِ إِلَّا بَعْدَ ثَلَاثَةِ أَيَّامٍ، كَمَا كَانَ يَفْعَلُ البَدْوُ قَدِيمًا.</a:t>
@@ -9394,6 +9461,7 @@
                   <a:srgbClr val="1F2A37"/>
                 </a:solidFill>
                 <a:latin typeface="Amiri" pitchFamily="2" charset="-78"/>
+                <a:ea typeface="Amiri" pitchFamily="2" charset="-78"/>
                 <a:cs typeface="Amiri" pitchFamily="2" charset="-78"/>
               </a:rPr>
               <a:t>وَحِينَ أُقَارِنُهَا بِالضِّيَافَةِ البَرِيطَانِيَّةِ، أَجِدُ أَنَّ هٰذِهِ أَكْثَرُ تَنْظِيمًا وَاحْتِرَامًا لِخُصُوصِيَّةِ الآخَرِينَ، بَيْنَمَا تِلْكَ أَكْثَرُ دِفْئًا وَعَفْوِيَّةً. وَلَا أَرَى أَنَّ إِحْدَاهُمَا أَفْضَلُ مِنَ الأُخْرَى؛ فَلِكُلٍّ مِنْهُمَا جَمَالُهَا، وَلِكُلٍّ مِنْهُمَا مَا يُمْكِنُ أَنْ نَتَعَلَّمَهُ.</a:t>
@@ -9413,6 +9481,7 @@
                   <a:srgbClr val="1F2A37"/>
                 </a:solidFill>
                 <a:latin typeface="Amiri" pitchFamily="2" charset="-78"/>
+                <a:ea typeface="Amiri" pitchFamily="2" charset="-78"/>
                 <a:cs typeface="Amiri" pitchFamily="2" charset="-78"/>
               </a:rPr>
               <a:t>وَلِذٰلِكَ أَنْصَحُ كُلَّ مَنْ يَزُورُ بَيْتًا عَرَبِيًّا: اِقْبَلِ القَهْوَةَ، وَلَا تَرْفُضِ الطَّعَامَ مِنَ المَرَّةِ الأُولَى، وَلَا تَنْسَ أَنْ تَمْدَحَ الطَّبْخَ وَتَشْكُرَ المُضِيفَ عِنْدَ الخُرُوجِ. وَلَوْ طَبَّقَ النَّاسُ أَجْمَلَ مَا فِي الثَّقَافَتَيْنِ، لَأَصْبَحَ كُلُّ ضَيْفٍ صَاحِبَ بَيْتٍ حَقًّا.</a:t>
@@ -9511,11 +9580,12 @@
               <a:buNone/>
             </a:pPr>
             <a:r>
-              <a:rPr lang="en-US" sz="950" b="1" dirty="0">
+              <a:rPr lang="ar-SA" sz="950" b="1" dirty="0">
                 <a:solidFill>
                   <a:srgbClr val="FFFFFF"/>
                 </a:solidFill>
                 <a:latin typeface="Calibri" pitchFamily="34" charset="0"/>
+                <a:ea typeface="Amiri" pitchFamily="2" charset="-78"/>
                 <a:cs typeface="Amiri" pitchFamily="2" charset="-78"/>
               </a:rPr>
               <a:t>لَيْسَتْ مُجَرَّدَ … بَلْ</a:t>
@@ -9576,11 +9646,12 @@
               <a:buNone/>
             </a:pPr>
             <a:r>
-              <a:rPr lang="en-US" sz="950" b="1" dirty="0">
+              <a:rPr lang="ar-SA" sz="950" b="1" dirty="0">
                 <a:solidFill>
                   <a:srgbClr val="FFFFFF"/>
                 </a:solidFill>
                 <a:latin typeface="Calibri" pitchFamily="34" charset="0"/>
+                <a:ea typeface="Amiri" pitchFamily="2" charset="-78"/>
                 <a:cs typeface="Amiri" pitchFamily="2" charset="-78"/>
               </a:rPr>
               <a:t>أَلَّا تَسْأَلَهُ … إِلَّا</a:t>
@@ -9641,11 +9712,12 @@
               <a:buNone/>
             </a:pPr>
             <a:r>
-              <a:rPr lang="en-US" sz="950" b="1" dirty="0">
+              <a:rPr lang="ar-SA" sz="950" b="1" dirty="0">
                 <a:solidFill>
                   <a:srgbClr val="FFFFFF"/>
                 </a:solidFill>
                 <a:latin typeface="Calibri" pitchFamily="34" charset="0"/>
+                <a:ea typeface="Amiri" pitchFamily="2" charset="-78"/>
                 <a:cs typeface="Amiri" pitchFamily="2" charset="-78"/>
               </a:rPr>
               <a:t>هٰذِهِ … بَيْنَمَا تِلْكَ</a:t>
@@ -9706,11 +9778,12 @@
               <a:buNone/>
             </a:pPr>
             <a:r>
-              <a:rPr lang="en-US" sz="950" b="1" dirty="0">
+              <a:rPr lang="ar-SA" sz="950" b="1" dirty="0">
                 <a:solidFill>
                   <a:srgbClr val="FFFFFF"/>
                 </a:solidFill>
                 <a:latin typeface="Calibri" pitchFamily="34" charset="0"/>
+                <a:ea typeface="Amiri" pitchFamily="2" charset="-78"/>
                 <a:cs typeface="Amiri" pitchFamily="2" charset="-78"/>
               </a:rPr>
               <a:t>لَوْ طَبَّقَ … لَأَصْبَحَ</a:t>
@@ -9844,6 +9917,7 @@
                   <a:srgbClr val="D4AF37"/>
                 </a:solidFill>
                 <a:latin typeface="Amiri" pitchFamily="2" charset="-78"/>
+                <a:ea typeface="Amiri" pitchFamily="2" charset="-78"/>
                 <a:cs typeface="Amiri" pitchFamily="2" charset="-78"/>
               </a:rPr>
               <a:t>م</a:t>
@@ -10101,6 +10175,7 @@
                   <a:srgbClr val="8A6D1E"/>
                 </a:solidFill>
                 <a:latin typeface="Amiri" pitchFamily="2" charset="-78"/>
+                <a:ea typeface="Amiri" pitchFamily="2" charset="-78"/>
                 <a:cs typeface="Amiri" pitchFamily="2" charset="-78"/>
               </a:rPr>
               <a:t>ب</a:t>
@@ -10165,6 +10240,7 @@
                   <a:srgbClr val="1B3B6F"/>
                 </a:solidFill>
                 <a:latin typeface="Amiri" pitchFamily="2" charset="-78"/>
+                <a:ea typeface="Amiri" pitchFamily="2" charset="-78"/>
                 <a:cs typeface="Amiri" pitchFamily="2" charset="-78"/>
               </a:rPr>
               <a:t>ب</a:t>
@@ -10216,6 +10292,7 @@
                   <a:srgbClr val="8A6D1E"/>
                 </a:solidFill>
                 <a:latin typeface="Amiri" pitchFamily="2" charset="-78"/>
+                <a:ea typeface="Amiri" pitchFamily="2" charset="-78"/>
                 <a:cs typeface="Amiri" pitchFamily="2" charset="-78"/>
               </a:rPr>
               <a:t>نَمُوذَجُ الإِجَابَةِ</a:t>
@@ -10329,6 +10406,7 @@
                   <a:srgbClr val="1F2A37"/>
                 </a:solidFill>
                 <a:latin typeface="Amiri" pitchFamily="2" charset="-78"/>
+                <a:ea typeface="Amiri" pitchFamily="2" charset="-78"/>
                 <a:cs typeface="Amiri" pitchFamily="2" charset="-78"/>
               </a:rPr>
               <a:t>فِي زَمَنِ الوَجَبَاتِ السَّرِيعَةِ وَالرَّسَائِلِ القَصِيرَةِ، صَارَ كَثِيرٌ مِنَ الشَّبَابِ يَرَوْنَ أَنَّ آدَابَ الضِّيَافَةِ التَّقْلِيدِيَّةَ مُتْعِبَةٌ وَقَدِيمَةٌ. فَهَلْ مَا زَالَتْ هٰذِهِ الآدَابُ مُهِمَّةً فِي عَالَمِنَا اليَوْمَ؟</a:t>
@@ -10348,6 +10426,7 @@
                   <a:srgbClr val="1F2A37"/>
                 </a:solidFill>
                 <a:latin typeface="Amiri" pitchFamily="2" charset="-78"/>
+                <a:ea typeface="Amiri" pitchFamily="2" charset="-78"/>
                 <a:cs typeface="Amiri" pitchFamily="2" charset="-78"/>
               </a:rPr>
               <a:t>مِنْ نَاحِيَةٍ، يَصْعُبُ عَلَى العَائِلَاتِ الَّتِي يَعْمَلُ فِيهَا الوَالِدَانِ أَنْ تَطْبُخَ وَلَائِمَ كَبِيرَةً، أَوْ أَنْ تَسْتَقْبِلَ ضُيُوفًا بِلَا مَوْعِدٍ. وَمِنْ نَاحِيَةٍ أُخْرَى، فَإِنَّ جَوْهَرَ الضِّيَافَةِ لَيْسَ فِي كَثْرَةِ الطَّعَامِ، بَلْ فِي الاحْتِرَامِ وَالاهْتِمَامِ بِالآخَرِ، وَهٰذَا لَا يَحْتَاجُ إِلَى وَقْتٍ أَوْ مَالٍ.</a:t>
@@ -10367,6 +10446,7 @@
                   <a:srgbClr val="1F2A37"/>
                 </a:solidFill>
                 <a:latin typeface="Amiri" pitchFamily="2" charset="-78"/>
+                <a:ea typeface="Amiri" pitchFamily="2" charset="-78"/>
                 <a:cs typeface="Amiri" pitchFamily="2" charset="-78"/>
               </a:rPr>
               <a:t>وَقَدْ تَعَلَّمْتُ هٰذَا الدَّرْسَ عِنْدَمَا وَصَلَتْ إِلَى شَارِعِنَا عَائِلَةٌ سُورِيَّةٌ لَاجِئَةٌ؛ فَلَمْ نُقَدِّمْ لَهُمْ وَلِيمَةً، بَلْ كُوبَ شَايٍ وَابْتِسَامَةً وَمُسَاعَدَةً فِي تَسْجِيلِ الأَطْفَالِ فِي المَدْرَسَةِ. وَبَعْدَ سَنَةٍ، قَالَتْ لَنَا الأُمُّ إِنَّ ذٰلِكَ الكُوبَ كَانَ أَوَّلَ شَيْءٍ جَعَلَهَا تَشْعُرُ بِالأَمَانِ.</a:t>
@@ -10386,6 +10466,7 @@
                   <a:srgbClr val="1F2A37"/>
                 </a:solidFill>
                 <a:latin typeface="Amiri" pitchFamily="2" charset="-78"/>
+                <a:ea typeface="Amiri" pitchFamily="2" charset="-78"/>
                 <a:cs typeface="Amiri" pitchFamily="2" charset="-78"/>
               </a:rPr>
               <a:t>لِذٰلِكَ أَرَى أَنَّ شَكْلَ الضِّيَافَةِ يَتَغَيَّرُ، غَيْرَ أَنَّ رُوحَهَا أَهَمُّ مِنْ أَيِّ وَقْتٍ مَضَى. فَإِذَا حَافَظْنَا عَلَى هٰذِهِ الرُّوحِ، فَسَيَبْقَى العَالَمُ مَكَانًا أَدْفَأَ لِلْغُرَبَاءِ.</a:t>
@@ -10484,11 +10565,12 @@
               <a:buNone/>
             </a:pPr>
             <a:r>
-              <a:rPr lang="en-US" sz="950" b="1" dirty="0">
+              <a:rPr lang="ar-SA" sz="950" b="1" dirty="0">
                 <a:solidFill>
                   <a:srgbClr val="FFFFFF"/>
                 </a:solidFill>
                 <a:latin typeface="Calibri" pitchFamily="34" charset="0"/>
+                <a:ea typeface="Amiri" pitchFamily="2" charset="-78"/>
                 <a:cs typeface="Amiri" pitchFamily="2" charset="-78"/>
               </a:rPr>
               <a:t>صَارَ … يَرَوْنَ</a:t>
@@ -10549,11 +10631,12 @@
               <a:buNone/>
             </a:pPr>
             <a:r>
-              <a:rPr lang="en-US" sz="950" b="1" dirty="0">
+              <a:rPr lang="ar-SA" sz="950" b="1" dirty="0">
                 <a:solidFill>
                   <a:srgbClr val="FFFFFF"/>
                 </a:solidFill>
                 <a:latin typeface="Calibri" pitchFamily="34" charset="0"/>
+                <a:ea typeface="Amiri" pitchFamily="2" charset="-78"/>
                 <a:cs typeface="Amiri" pitchFamily="2" charset="-78"/>
               </a:rPr>
               <a:t>لَيْسَ فِي … بَلْ فِي</a:t>
@@ -10614,11 +10697,12 @@
               <a:buNone/>
             </a:pPr>
             <a:r>
-              <a:rPr lang="en-US" sz="950" b="1" dirty="0">
+              <a:rPr lang="ar-SA" sz="950" b="1" dirty="0">
                 <a:solidFill>
                   <a:srgbClr val="FFFFFF"/>
                 </a:solidFill>
                 <a:latin typeface="Calibri" pitchFamily="34" charset="0"/>
+                <a:ea typeface="Amiri" pitchFamily="2" charset="-78"/>
                 <a:cs typeface="Amiri" pitchFamily="2" charset="-78"/>
               </a:rPr>
               <a:t>لَمْ نُقَدِّمْ … بَلْ</a:t>
@@ -10679,11 +10763,12 @@
               <a:buNone/>
             </a:pPr>
             <a:r>
-              <a:rPr lang="en-US" sz="950" b="1" dirty="0">
+              <a:rPr lang="ar-SA" sz="950" b="1" dirty="0">
                 <a:solidFill>
                   <a:srgbClr val="FFFFFF"/>
                 </a:solidFill>
                 <a:latin typeface="Calibri" pitchFamily="34" charset="0"/>
+                <a:ea typeface="Amiri" pitchFamily="2" charset="-78"/>
                 <a:cs typeface="Amiri" pitchFamily="2" charset="-78"/>
               </a:rPr>
               <a:t>أَهَمُّ مِنْ أَيِّ وَقْتٍ مَضَى</a:t>
@@ -10817,6 +10902,7 @@
                   <a:srgbClr val="D4AF37"/>
                 </a:solidFill>
                 <a:latin typeface="Amiri" pitchFamily="2" charset="-78"/>
+                <a:ea typeface="Amiri" pitchFamily="2" charset="-78"/>
                 <a:cs typeface="Amiri" pitchFamily="2" charset="-78"/>
               </a:rPr>
               <a:t>م</a:t>
@@ -11137,6 +11223,7 @@
                   <a:srgbClr val="8A6D1E"/>
                 </a:solidFill>
                 <a:latin typeface="Amiri" pitchFamily="2" charset="-78"/>
+                <a:ea typeface="Amiri" pitchFamily="2" charset="-78"/>
                 <a:cs typeface="Amiri" pitchFamily="2" charset="-78"/>
               </a:rPr>
               <a:t>قَيِّمْ عَمَلَكَ</a:t>
@@ -12381,6 +12468,7 @@
                   <a:srgbClr val="FFFFFF"/>
                 </a:solidFill>
                 <a:latin typeface="Amiri" pitchFamily="2" charset="-78"/>
+                <a:ea typeface="Amiri" pitchFamily="2" charset="-78"/>
                 <a:cs typeface="Amiri" pitchFamily="2" charset="-78"/>
               </a:rPr>
               <a:t>أَحْسَنْتُمْ! إِلَى اللِّقَاءِ</a:t>
@@ -12533,6 +12621,7 @@
                   <a:srgbClr val="D4AF37"/>
                 </a:solidFill>
                 <a:latin typeface="Amiri" pitchFamily="2" charset="-78"/>
+                <a:ea typeface="Amiri" pitchFamily="2" charset="-78"/>
                 <a:cs typeface="Amiri" pitchFamily="2" charset="-78"/>
               </a:rPr>
               <a:t>وَرْشَةُ التَّدْرِيبِ</a:t>
@@ -12666,6 +12755,7 @@
                   <a:srgbClr val="D4AF37"/>
                 </a:solidFill>
                 <a:latin typeface="Amiri" pitchFamily="2" charset="-78"/>
+                <a:ea typeface="Amiri" pitchFamily="2" charset="-78"/>
                 <a:cs typeface="Amiri" pitchFamily="2" charset="-78"/>
               </a:rPr>
               <a:t>م</a:t>
@@ -12986,6 +13076,7 @@
                   <a:srgbClr val="8A6D1E"/>
                 </a:solidFill>
                 <a:latin typeface="Amiri" pitchFamily="2" charset="-78"/>
+                <a:ea typeface="Amiri" pitchFamily="2" charset="-78"/>
                 <a:cs typeface="Amiri" pitchFamily="2" charset="-78"/>
               </a:rPr>
               <a:t>آدَابُ الصَّفِّ</a:t>
@@ -14517,6 +14608,7 @@
                   <a:srgbClr val="D4AF37"/>
                 </a:solidFill>
                 <a:latin typeface="Amiri" pitchFamily="2" charset="-78"/>
+                <a:ea typeface="Amiri" pitchFamily="2" charset="-78"/>
                 <a:cs typeface="Amiri" pitchFamily="2" charset="-78"/>
               </a:rPr>
               <a:t>م</a:t>
@@ -14837,6 +14929,7 @@
                   <a:srgbClr val="8A6D1E"/>
                 </a:solidFill>
                 <a:latin typeface="Amiri" pitchFamily="2" charset="-78"/>
+                <a:ea typeface="Amiri" pitchFamily="2" charset="-78"/>
                 <a:cs typeface="Amiri" pitchFamily="2" charset="-78"/>
               </a:rPr>
               <a:t>خَرِيطَةُ الوَرْشَةِ</a:t>
@@ -15151,6 +15244,7 @@
                   <a:srgbClr val="1B3B6F"/>
                 </a:solidFill>
                 <a:latin typeface="Amiri" pitchFamily="2" charset="-78"/>
+                <a:ea typeface="Amiri" pitchFamily="2" charset="-78"/>
                 <a:cs typeface="Amiri" pitchFamily="2" charset="-78"/>
               </a:rPr>
               <a:t>كَيْفَ</a:t>
@@ -15427,6 +15521,7 @@
                   <a:srgbClr val="1E6B52"/>
                 </a:solidFill>
                 <a:latin typeface="Amiri" pitchFamily="2" charset="-78"/>
+                <a:ea typeface="Amiri" pitchFamily="2" charset="-78"/>
                 <a:cs typeface="Amiri" pitchFamily="2" charset="-78"/>
               </a:rPr>
               <a:t>الاسْتِمَارَةُ</a:t>
@@ -15703,6 +15798,7 @@
                   <a:srgbClr val="1E6B52"/>
                 </a:solidFill>
                 <a:latin typeface="Amiri" pitchFamily="2" charset="-78"/>
+                <a:ea typeface="Amiri" pitchFamily="2" charset="-78"/>
                 <a:cs typeface="Amiri" pitchFamily="2" charset="-78"/>
               </a:rPr>
               <a:t>الرِّسَالَةُ</a:t>
@@ -15979,6 +16075,7 @@
                   <a:srgbClr val="1E6B52"/>
                 </a:solidFill>
                 <a:latin typeface="Amiri" pitchFamily="2" charset="-78"/>
+                <a:ea typeface="Amiri" pitchFamily="2" charset="-78"/>
                 <a:cs typeface="Amiri" pitchFamily="2" charset="-78"/>
               </a:rPr>
               <a:t>المَقَالُ</a:t>
@@ -16255,6 +16352,7 @@
                   <a:srgbClr val="8A6D1E"/>
                 </a:solidFill>
                 <a:latin typeface="Amiri" pitchFamily="2" charset="-78"/>
+                <a:ea typeface="Amiri" pitchFamily="2" charset="-78"/>
                 <a:cs typeface="Amiri" pitchFamily="2" charset="-78"/>
               </a:rPr>
               <a:t>قَيِّمْ</a:t>
@@ -16498,6 +16596,7 @@
                   <a:srgbClr val="D4AF37"/>
                 </a:solidFill>
                 <a:latin typeface="Amiri" pitchFamily="2" charset="-78"/>
+                <a:ea typeface="Amiri" pitchFamily="2" charset="-78"/>
                 <a:cs typeface="Amiri" pitchFamily="2" charset="-78"/>
               </a:rPr>
               <a:t>م</a:t>
@@ -16818,6 +16917,7 @@
                   <a:srgbClr val="8A6D1E"/>
                 </a:solidFill>
                 <a:latin typeface="Amiri" pitchFamily="2" charset="-78"/>
+                <a:ea typeface="Amiri" pitchFamily="2" charset="-78"/>
                 <a:cs typeface="Amiri" pitchFamily="2" charset="-78"/>
               </a:rPr>
               <a:t>امْتِحَانُ الكِتَابَةِ</a:t>
@@ -17442,6 +17542,7 @@
                   <a:srgbClr val="1B3B6F"/>
                 </a:solidFill>
                 <a:latin typeface="Amiri" pitchFamily="2" charset="-78"/>
+                <a:ea typeface="Amiri" pitchFamily="2" charset="-78"/>
                 <a:cs typeface="Amiri" pitchFamily="2" charset="-78"/>
               </a:rPr>
               <a:t>اِخْلَعِي حِذَاءَكِ عِنْدَ البَابِ، وَلَا تَرْفُضِي القَهْوَةَ</a:t>
@@ -17541,6 +17642,7 @@
                   <a:srgbClr val="1B3B6F"/>
                 </a:solidFill>
                 <a:latin typeface="Amiri" pitchFamily="2" charset="-78"/>
+                <a:ea typeface="Amiri" pitchFamily="2" charset="-78"/>
                 <a:cs typeface="Amiri" pitchFamily="2" charset="-78"/>
               </a:rPr>
               <a:t>الضِّيَافَةُ العَرَبِيَّةُ أَكْثَرُ دِفْئًا</a:t>
@@ -17640,6 +17742,7 @@
                   <a:srgbClr val="1B3B6F"/>
                 </a:solidFill>
                 <a:latin typeface="Amiri" pitchFamily="2" charset="-78"/>
+                <a:ea typeface="Amiri" pitchFamily="2" charset="-78"/>
                 <a:cs typeface="Amiri" pitchFamily="2" charset="-78"/>
               </a:rPr>
               <a:t>الزِّيَارَاتُ هُنَا أَقْصَرُ مِنْ زِيَارَاتِنَا</a:t>
@@ -17811,6 +17914,7 @@
                   <a:srgbClr val="D4AF37"/>
                 </a:solidFill>
                 <a:latin typeface="Amiri" pitchFamily="2" charset="-78"/>
+                <a:ea typeface="Amiri" pitchFamily="2" charset="-78"/>
                 <a:cs typeface="Amiri" pitchFamily="2" charset="-78"/>
               </a:rPr>
               <a:t>م</a:t>
@@ -18131,6 +18235,7 @@
                   <a:srgbClr val="8A6D1E"/>
                 </a:solidFill>
                 <a:latin typeface="Amiri" pitchFamily="2" charset="-78"/>
+                <a:ea typeface="Amiri" pitchFamily="2" charset="-78"/>
                 <a:cs typeface="Amiri" pitchFamily="2" charset="-78"/>
               </a:rPr>
               <a:t>اسْتِمَارَةُ العَائِلَةِ المُضِيفَةِ</a:t>
@@ -18487,6 +18592,7 @@
                   <a:srgbClr val="1B3B6F"/>
                 </a:solidFill>
                 <a:latin typeface="Amiri" pitchFamily="2" charset="-78"/>
+                <a:ea typeface="Amiri" pitchFamily="2" charset="-78"/>
                 <a:cs typeface="Amiri" pitchFamily="2" charset="-78"/>
               </a:rPr>
               <a:t>اسْمُ العَائِلَةِ</a:t>
@@ -18731,6 +18837,7 @@
                   <a:srgbClr val="1B3B6F"/>
                 </a:solidFill>
                 <a:latin typeface="Amiri" pitchFamily="2" charset="-78"/>
+                <a:ea typeface="Amiri" pitchFamily="2" charset="-78"/>
                 <a:cs typeface="Amiri" pitchFamily="2" charset="-78"/>
               </a:rPr>
               <a:t>المَدِينَةُ</a:t>
@@ -18975,6 +19082,7 @@
                   <a:srgbClr val="1B3B6F"/>
                 </a:solidFill>
                 <a:latin typeface="Amiri" pitchFamily="2" charset="-78"/>
+                <a:ea typeface="Amiri" pitchFamily="2" charset="-78"/>
                 <a:cs typeface="Amiri" pitchFamily="2" charset="-78"/>
               </a:rPr>
               <a:t>عَدَدُ أَفْرَادِ الأُسْرَةِ</a:t>
@@ -19219,6 +19327,7 @@
                   <a:srgbClr val="1B3B6F"/>
                 </a:solidFill>
                 <a:latin typeface="Amiri" pitchFamily="2" charset="-78"/>
+                <a:ea typeface="Amiri" pitchFamily="2" charset="-78"/>
                 <a:cs typeface="Amiri" pitchFamily="2" charset="-78"/>
               </a:rPr>
               <a:t>لُغَةُ البَيْتِ</a:t>
@@ -19463,6 +19572,7 @@
                   <a:srgbClr val="1B3B6F"/>
                 </a:solidFill>
                 <a:latin typeface="Amiri" pitchFamily="2" charset="-78"/>
+                <a:ea typeface="Amiri" pitchFamily="2" charset="-78"/>
                 <a:cs typeface="Amiri" pitchFamily="2" charset="-78"/>
               </a:rPr>
               <a:t>وَجْبَةٌ تَقْلِيدِيَّةٌ</a:t>
@@ -19707,6 +19817,7 @@
                   <a:srgbClr val="1B3B6F"/>
                 </a:solidFill>
                 <a:latin typeface="Amiri" pitchFamily="2" charset="-78"/>
+                <a:ea typeface="Amiri" pitchFamily="2" charset="-78"/>
                 <a:cs typeface="Amiri" pitchFamily="2" charset="-78"/>
               </a:rPr>
               <a:t>عَادَةٌ فِي البَيْتِ</a:t>
@@ -19951,6 +20062,7 @@
                   <a:srgbClr val="1B3B6F"/>
                 </a:solidFill>
                 <a:latin typeface="Amiri" pitchFamily="2" charset="-78"/>
+                <a:ea typeface="Amiri" pitchFamily="2" charset="-78"/>
                 <a:cs typeface="Amiri" pitchFamily="2" charset="-78"/>
               </a:rPr>
               <a:t>نَصِيحَةٌ لِلضَّيْفِ</a:t>
@@ -20130,6 +20242,7 @@
                   <a:srgbClr val="1B3B6F"/>
                 </a:solidFill>
                 <a:latin typeface="Amiri" pitchFamily="2" charset="-78"/>
+                <a:ea typeface="Amiri" pitchFamily="2" charset="-78"/>
                 <a:cs typeface="Amiri" pitchFamily="2" charset="-78"/>
               </a:rPr>
               <a:t>جُمْلَةٌ: كَيْفَ تَخْتَلِفُ ضِيَافَتُكُمْ؟</a:t>
@@ -20339,6 +20452,7 @@
                   <a:srgbClr val="D4AF37"/>
                 </a:solidFill>
                 <a:latin typeface="Amiri" pitchFamily="2" charset="-78"/>
+                <a:ea typeface="Amiri" pitchFamily="2" charset="-78"/>
                 <a:cs typeface="Amiri" pitchFamily="2" charset="-78"/>
               </a:rPr>
               <a:t>م</a:t>
@@ -20659,6 +20773,7 @@
                   <a:srgbClr val="8A6D1E"/>
                 </a:solidFill>
                 <a:latin typeface="Amiri" pitchFamily="2" charset="-78"/>
+                <a:ea typeface="Amiri" pitchFamily="2" charset="-78"/>
                 <a:cs typeface="Amiri" pitchFamily="2" charset="-78"/>
               </a:rPr>
               <a:t>نَمُوذَجُ الإِجَابَةِ</a:t>
@@ -20977,6 +21092,7 @@
                   <a:srgbClr val="1B3B6F"/>
                 </a:solidFill>
                 <a:latin typeface="Amiri" pitchFamily="2" charset="-78"/>
+                <a:ea typeface="Amiri" pitchFamily="2" charset="-78"/>
                 <a:cs typeface="Amiri" pitchFamily="2" charset="-78"/>
               </a:rPr>
               <a:t>عَائِلَةُ الحُسَيْنِيِّ</a:t>
@@ -21015,6 +21131,7 @@
                   <a:srgbClr val="1B3B6F"/>
                 </a:solidFill>
                 <a:latin typeface="Amiri" pitchFamily="2" charset="-78"/>
+                <a:ea typeface="Amiri" pitchFamily="2" charset="-78"/>
                 <a:cs typeface="Amiri" pitchFamily="2" charset="-78"/>
               </a:rPr>
               <a:t>اسْمُ العَائِلَةِ</a:t>
@@ -21156,6 +21273,7 @@
                   <a:srgbClr val="1B3B6F"/>
                 </a:solidFill>
                 <a:latin typeface="Amiri" pitchFamily="2" charset="-78"/>
+                <a:ea typeface="Amiri" pitchFamily="2" charset="-78"/>
                 <a:cs typeface="Amiri" pitchFamily="2" charset="-78"/>
               </a:rPr>
               <a:t>عَمَّانُ</a:t>
@@ -21194,6 +21312,7 @@
                   <a:srgbClr val="1B3B6F"/>
                 </a:solidFill>
                 <a:latin typeface="Amiri" pitchFamily="2" charset="-78"/>
+                <a:ea typeface="Amiri" pitchFamily="2" charset="-78"/>
                 <a:cs typeface="Amiri" pitchFamily="2" charset="-78"/>
               </a:rPr>
               <a:t>المَدِينَةُ</a:t>
@@ -21335,6 +21454,7 @@
                   <a:srgbClr val="1B3B6F"/>
                 </a:solidFill>
                 <a:latin typeface="Amiri" pitchFamily="2" charset="-78"/>
+                <a:ea typeface="Amiri" pitchFamily="2" charset="-78"/>
                 <a:cs typeface="Amiri" pitchFamily="2" charset="-78"/>
               </a:rPr>
               <a:t>سِتَّةٌ</a:t>
@@ -21373,6 +21493,7 @@
                   <a:srgbClr val="1B3B6F"/>
                 </a:solidFill>
                 <a:latin typeface="Amiri" pitchFamily="2" charset="-78"/>
+                <a:ea typeface="Amiri" pitchFamily="2" charset="-78"/>
                 <a:cs typeface="Amiri" pitchFamily="2" charset="-78"/>
               </a:rPr>
               <a:t>عَدَدُ أَفْرَادِ الأُسْرَةِ</a:t>
@@ -21514,6 +21635,7 @@
                   <a:srgbClr val="1B3B6F"/>
                 </a:solidFill>
                 <a:latin typeface="Amiri" pitchFamily="2" charset="-78"/>
+                <a:ea typeface="Amiri" pitchFamily="2" charset="-78"/>
                 <a:cs typeface="Amiri" pitchFamily="2" charset="-78"/>
               </a:rPr>
               <a:t>العَرَبِيَّةُ</a:t>
@@ -21552,6 +21674,7 @@
                   <a:srgbClr val="1B3B6F"/>
                 </a:solidFill>
                 <a:latin typeface="Amiri" pitchFamily="2" charset="-78"/>
+                <a:ea typeface="Amiri" pitchFamily="2" charset="-78"/>
                 <a:cs typeface="Amiri" pitchFamily="2" charset="-78"/>
               </a:rPr>
               <a:t>لُغَةُ البَيْتِ</a:t>
@@ -21693,6 +21816,7 @@
                   <a:srgbClr val="1B3B6F"/>
                 </a:solidFill>
                 <a:latin typeface="Amiri" pitchFamily="2" charset="-78"/>
+                <a:ea typeface="Amiri" pitchFamily="2" charset="-78"/>
                 <a:cs typeface="Amiri" pitchFamily="2" charset="-78"/>
               </a:rPr>
               <a:t>المَنْسَفُ</a:t>
@@ -21731,6 +21855,7 @@
                   <a:srgbClr val="1B3B6F"/>
                 </a:solidFill>
                 <a:latin typeface="Amiri" pitchFamily="2" charset="-78"/>
+                <a:ea typeface="Amiri" pitchFamily="2" charset="-78"/>
                 <a:cs typeface="Amiri" pitchFamily="2" charset="-78"/>
               </a:rPr>
               <a:t>وَجْبَةٌ تَقْلِيدِيَّةٌ</a:t>
@@ -21872,6 +21997,7 @@
                   <a:srgbClr val="1B3B6F"/>
                 </a:solidFill>
                 <a:latin typeface="Amiri" pitchFamily="2" charset="-78"/>
+                <a:ea typeface="Amiri" pitchFamily="2" charset="-78"/>
                 <a:cs typeface="Amiri" pitchFamily="2" charset="-78"/>
               </a:rPr>
               <a:t>خَلْعُ الأَحْذِيَةِ</a:t>
@@ -21910,6 +22036,7 @@
                   <a:srgbClr val="1B3B6F"/>
                 </a:solidFill>
                 <a:latin typeface="Amiri" pitchFamily="2" charset="-78"/>
+                <a:ea typeface="Amiri" pitchFamily="2" charset="-78"/>
                 <a:cs typeface="Amiri" pitchFamily="2" charset="-78"/>
               </a:rPr>
               <a:t>عَادَةٌ فِي البَيْتِ</a:t>
@@ -22051,6 +22178,7 @@
                   <a:srgbClr val="1B3B6F"/>
                 </a:solidFill>
                 <a:latin typeface="Amiri" pitchFamily="2" charset="-78"/>
+                <a:ea typeface="Amiri" pitchFamily="2" charset="-78"/>
                 <a:cs typeface="Amiri" pitchFamily="2" charset="-78"/>
               </a:rPr>
               <a:t>اِقْبَلِ القَهْوَةَ</a:t>
@@ -22089,6 +22217,7 @@
                   <a:srgbClr val="1B3B6F"/>
                 </a:solidFill>
                 <a:latin typeface="Amiri" pitchFamily="2" charset="-78"/>
+                <a:ea typeface="Amiri" pitchFamily="2" charset="-78"/>
                 <a:cs typeface="Amiri" pitchFamily="2" charset="-78"/>
               </a:rPr>
               <a:t>نَصِيحَةٌ لِلضَّيْفِ</a:t>
@@ -22230,6 +22359,7 @@
                   <a:srgbClr val="1B3B6F"/>
                 </a:solidFill>
                 <a:latin typeface="Amiri" pitchFamily="2" charset="-78"/>
+                <a:ea typeface="Amiri" pitchFamily="2" charset="-78"/>
                 <a:cs typeface="Amiri" pitchFamily="2" charset="-78"/>
               </a:rPr>
               <a:t>ضِيَافَتُنَا أَكْثَرُ دِفْئًا وَأَقَلُّ رَسْمِيَّةً مِنَ الضِّيَافَةِ البَرِيطَانِيَّةِ.</a:t>
@@ -22268,6 +22398,7 @@
                   <a:srgbClr val="1B3B6F"/>
                 </a:solidFill>
                 <a:latin typeface="Amiri" pitchFamily="2" charset="-78"/>
+                <a:ea typeface="Amiri" pitchFamily="2" charset="-78"/>
                 <a:cs typeface="Amiri" pitchFamily="2" charset="-78"/>
               </a:rPr>
               <a:t>جُمْلَةٌ: كَيْفَ تَخْتَلِفُ ضِيَافَتُكُمْ؟</a:t>
@@ -22477,6 +22608,7 @@
                   <a:srgbClr val="D4AF37"/>
                 </a:solidFill>
                 <a:latin typeface="Amiri" pitchFamily="2" charset="-78"/>
+                <a:ea typeface="Amiri" pitchFamily="2" charset="-78"/>
                 <a:cs typeface="Amiri" pitchFamily="2" charset="-78"/>
               </a:rPr>
               <a:t>م</a:t>
@@ -22797,6 +22929,7 @@
                   <a:srgbClr val="8A6D1E"/>
                 </a:solidFill>
                 <a:latin typeface="Amiri" pitchFamily="2" charset="-78"/>
+                <a:ea typeface="Amiri" pitchFamily="2" charset="-78"/>
                 <a:cs typeface="Amiri" pitchFamily="2" charset="-78"/>
               </a:rPr>
               <a:t>نَصَائِحُ قَبْلَ الزِّيَارَةِ</a:t>
@@ -23272,6 +23405,7 @@
                   <a:srgbClr val="1B3B6F"/>
                 </a:solidFill>
                 <a:latin typeface="Amiri" pitchFamily="2" charset="-78"/>
+                <a:ea typeface="Amiri" pitchFamily="2" charset="-78"/>
                 <a:cs typeface="Amiri" pitchFamily="2" charset="-78"/>
               </a:rPr>
               <a:t>سَتَزُورِينَ بَيْتَ جَدِّي فِي …</a:t>
@@ -23348,6 +23482,7 @@
                   <a:srgbClr val="1B3B6F"/>
                 </a:solidFill>
                 <a:latin typeface="Amiri" pitchFamily="2" charset="-78"/>
+                <a:ea typeface="Amiri" pitchFamily="2" charset="-78"/>
                 <a:cs typeface="Amiri" pitchFamily="2" charset="-78"/>
               </a:rPr>
               <a:t>اِخْلَعِي … وَكُلِي … وَلَا تَرْفُضِي …</a:t>
@@ -23424,6 +23559,7 @@
                   <a:srgbClr val="1B3B6F"/>
                 </a:solidFill>
                 <a:latin typeface="Amiri" pitchFamily="2" charset="-78"/>
+                <a:ea typeface="Amiri" pitchFamily="2" charset="-78"/>
                 <a:cs typeface="Amiri" pitchFamily="2" charset="-78"/>
               </a:rPr>
               <a:t>يَأْكُلُ النَّاسُ هُنَاكَ أَكْثَرَ مِنْ هُنَا</a:t>
@@ -23500,6 +23636,7 @@
                   <a:srgbClr val="1B3B6F"/>
                 </a:solidFill>
                 <a:latin typeface="Amiri" pitchFamily="2" charset="-78"/>
+                <a:ea typeface="Amiri" pitchFamily="2" charset="-78"/>
                 <a:cs typeface="Amiri" pitchFamily="2" charset="-78"/>
               </a:rPr>
               <a:t>أَظُنُّ أَنَّ الضِّيَافَةَ هُنَاكَ أَجْمَلُ</a:t>
@@ -23671,6 +23808,7 @@
                   <a:srgbClr val="D4AF37"/>
                 </a:solidFill>
                 <a:latin typeface="Amiri" pitchFamily="2" charset="-78"/>
+                <a:ea typeface="Amiri" pitchFamily="2" charset="-78"/>
                 <a:cs typeface="Amiri" pitchFamily="2" charset="-78"/>
               </a:rPr>
               <a:t>م</a:t>
@@ -23991,6 +24129,7 @@
                   <a:srgbClr val="8A6D1E"/>
                 </a:solidFill>
                 <a:latin typeface="Amiri" pitchFamily="2" charset="-78"/>
+                <a:ea typeface="Amiri" pitchFamily="2" charset="-78"/>
                 <a:cs typeface="Amiri" pitchFamily="2" charset="-78"/>
               </a:rPr>
               <a:t>نَصُّ السُّؤَالِ</a:t>
@@ -24271,6 +24410,7 @@
                   <a:srgbClr val="1B3B6F"/>
                 </a:solidFill>
                 <a:latin typeface="Amiri" pitchFamily="2" charset="-78"/>
+                <a:ea typeface="Amiri" pitchFamily="2" charset="-78"/>
                 <a:cs typeface="Amiri" pitchFamily="2" charset="-78"/>
               </a:rPr>
               <a:t>اكْتُبِي رِسَالَةً إِلَى صَدِيقَتِكِ قَبْلَ زِيَارَتِهَا لِأُسْرَتِكِ (٨٠–٩٠ كَلِمَةً).</a:t>
@@ -24412,6 +24552,7 @@
                   <a:srgbClr val="1B3B6F"/>
                 </a:solidFill>
                 <a:latin typeface="Amiri" pitchFamily="2" charset="-78"/>
+                <a:ea typeface="Amiri" pitchFamily="2" charset="-78"/>
                 <a:cs typeface="Amiri" pitchFamily="2" charset="-78"/>
               </a:rPr>
               <a:t>أَيْنَ سَتَذْهَبُ صَدِيقَتُكِ؟ وَمَنْ سَتُقَابِلُ؟</a:t>
@@ -24553,6 +24694,7 @@
                   <a:srgbClr val="1B3B6F"/>
                 </a:solidFill>
                 <a:latin typeface="Amiri" pitchFamily="2" charset="-78"/>
+                <a:ea typeface="Amiri" pitchFamily="2" charset="-78"/>
                 <a:cs typeface="Amiri" pitchFamily="2" charset="-78"/>
               </a:rPr>
               <a:t>اُنْصُحِيهَا: كَيْفَ تَتَصَرَّفُ فِي البَيْتِ؟</a:t>
@@ -24694,6 +24836,7 @@
                   <a:srgbClr val="1B3B6F"/>
                 </a:solidFill>
                 <a:latin typeface="Amiri" pitchFamily="2" charset="-78"/>
+                <a:ea typeface="Amiri" pitchFamily="2" charset="-78"/>
                 <a:cs typeface="Amiri" pitchFamily="2" charset="-78"/>
               </a:rPr>
               <a:t>قَارِنِي بَيْنَ العَادَاتِ هُنَاكَ وَهُنَا.</a:t>
@@ -24835,6 +24978,7 @@
                   <a:srgbClr val="1B3B6F"/>
                 </a:solidFill>
                 <a:latin typeface="Amiri" pitchFamily="2" charset="-78"/>
+                <a:ea typeface="Amiri" pitchFamily="2" charset="-78"/>
                 <a:cs typeface="Amiri" pitchFamily="2" charset="-78"/>
               </a:rPr>
               <a:t>مَا رَأْيُكِ؟ وَمَاذَا سَتَفْعَلَانِ مَعًا؟ وَاسْأَلِيهَا سُؤَالًا.</a:t>
@@ -25044,6 +25188,7 @@
                   <a:srgbClr val="D4AF37"/>
                 </a:solidFill>
                 <a:latin typeface="Amiri" pitchFamily="2" charset="-78"/>
+                <a:ea typeface="Amiri" pitchFamily="2" charset="-78"/>
                 <a:cs typeface="Amiri" pitchFamily="2" charset="-78"/>
               </a:rPr>
               <a:t>م</a:t>
@@ -25364,6 +25509,7 @@
                   <a:srgbClr val="8A6D1E"/>
                 </a:solidFill>
                 <a:latin typeface="Amiri" pitchFamily="2" charset="-78"/>
+                <a:ea typeface="Amiri" pitchFamily="2" charset="-78"/>
                 <a:cs typeface="Amiri" pitchFamily="2" charset="-78"/>
               </a:rPr>
               <a:t>قَوَالِبُ الكِتَابَةِ</a:t>
@@ -25644,6 +25790,7 @@
                   <a:srgbClr val="1B3B6F"/>
                 </a:solidFill>
                 <a:latin typeface="Amiri" pitchFamily="2" charset="-78"/>
+                <a:ea typeface="Amiri" pitchFamily="2" charset="-78"/>
                 <a:cs typeface="Amiri" pitchFamily="2" charset="-78"/>
               </a:rPr>
               <a:t>مَرْحَبًا يَا ______ ، كَيْفَ حَالُكِ؟</a:t>
@@ -25850,6 +25997,7 @@
                   <a:srgbClr val="1B3B6F"/>
                 </a:solidFill>
                 <a:latin typeface="Amiri" pitchFamily="2" charset="-78"/>
+                <a:ea typeface="Amiri" pitchFamily="2" charset="-78"/>
                 <a:cs typeface="Amiri" pitchFamily="2" charset="-78"/>
               </a:rPr>
               <a:t>سَتَزُورِينَ بَيْتَ ______ فِي ______ .</a:t>
@@ -26056,6 +26204,7 @@
                   <a:srgbClr val="1B3B6F"/>
                 </a:solidFill>
                 <a:latin typeface="Amiri" pitchFamily="2" charset="-78"/>
+                <a:ea typeface="Amiri" pitchFamily="2" charset="-78"/>
                 <a:cs typeface="Amiri" pitchFamily="2" charset="-78"/>
               </a:rPr>
               <a:t>اِخْلَعِي ______ ، وَلَا تَرْفُضِي ______ .</a:t>
@@ -26262,6 +26411,7 @@
                   <a:srgbClr val="1B3B6F"/>
                 </a:solidFill>
                 <a:latin typeface="Amiri" pitchFamily="2" charset="-78"/>
+                <a:ea typeface="Amiri" pitchFamily="2" charset="-78"/>
                 <a:cs typeface="Amiri" pitchFamily="2" charset="-78"/>
               </a:rPr>
               <a:t>هُنَاكَ يَأْكُلُ النَّاسُ أَكْثَرَ مِنْ ______ .</a:t>
@@ -26468,6 +26618,7 @@
                   <a:srgbClr val="1B3B6F"/>
                 </a:solidFill>
                 <a:latin typeface="Amiri" pitchFamily="2" charset="-78"/>
+                <a:ea typeface="Amiri" pitchFamily="2" charset="-78"/>
                 <a:cs typeface="Amiri" pitchFamily="2" charset="-78"/>
               </a:rPr>
               <a:t>أَظُنُّ أَنَّ ______ . سَنَطْبُخُ ______ مَعًا.</a:t>
@@ -26674,6 +26825,7 @@
                   <a:srgbClr val="1B3B6F"/>
                 </a:solidFill>
                 <a:latin typeface="Amiri" pitchFamily="2" charset="-78"/>
+                <a:ea typeface="Amiri" pitchFamily="2" charset="-78"/>
                 <a:cs typeface="Amiri" pitchFamily="2" charset="-78"/>
               </a:rPr>
               <a:t>هَلْ عِنْدَكِ ______ ؟ مَعَ السَّلَامَةِ.</a:t>
@@ -26913,13 +27065,9 @@
     <a:fontScheme name="Office">
       <a:majorFont>
         <a:latin typeface="Calibri Light" panose="020F0302020204030204"/>
-        <a:ea typeface=""/>
-        <a:cs typeface=""/>
-        <a:font script="Jpan" typeface="游ゴシック Light"/>
-        <a:font script="Hang" typeface="맑은 고딕"/>
-        <a:font script="Hans" typeface="等线 Light"/>
-        <a:font script="Hant" typeface="新細明體"/>
-        <a:font script="Arab" typeface="Times New Roman"/>
+        <a:ea typeface="Amiri" pitchFamily="2" charset="-78"/>
+        <a:cs typeface="Amiri" pitchFamily="2" charset="-78"/>
+        <a:font script="Arab" typeface="Amiri"/>
         <a:font script="Hebr" typeface="Times New Roman"/>
         <a:font script="Thai" typeface="Angsana New"/>
         <a:font script="Ethi" typeface="Nyala"/>
@@ -26965,13 +27113,9 @@
       </a:majorFont>
       <a:minorFont>
         <a:latin typeface="Calibri" panose="020F0502020204030204"/>
-        <a:ea typeface=""/>
-        <a:cs typeface=""/>
-        <a:font script="Jpan" typeface="游ゴシック"/>
-        <a:font script="Hang" typeface="맑은 고딕"/>
-        <a:font script="Hans" typeface="等线"/>
-        <a:font script="Hant" typeface="新細明體"/>
-        <a:font script="Arab" typeface="Arial"/>
+        <a:ea typeface="Amiri" pitchFamily="2" charset="-78"/>
+        <a:cs typeface="Amiri" pitchFamily="2" charset="-78"/>
+        <a:font script="Arab" typeface="Amiri"/>
         <a:font script="Hebr" typeface="Arial"/>
         <a:font script="Thai" typeface="Cordia New"/>
         <a:font script="Ethi" typeface="Nyala"/>

--- a/Topic_E/Exam_Practice/TE-L04_Writing_Workshop_Customs_Etiquette_and_Hospitality.pptx
+++ b/Topic_E/Exam_Practice/TE-L04_Writing_Workshop_Customs_Etiquette_and_Hospitality.pptx
@@ -3848,7 +3848,7 @@
                 <a:solidFill>
                   <a:srgbClr val="FFFFFF"/>
                 </a:solidFill>
-                <a:latin typeface="Calibri" pitchFamily="34" charset="0"/>
+                <a:latin typeface="Amiri" pitchFamily="2" charset="-78"/>
                 <a:ea typeface="Amiri" pitchFamily="2" charset="-78"/>
                 <a:cs typeface="Amiri" pitchFamily="2" charset="-78"/>
               </a:rPr>
@@ -3914,7 +3914,7 @@
                 <a:solidFill>
                   <a:srgbClr val="FFFFFF"/>
                 </a:solidFill>
-                <a:latin typeface="Calibri" pitchFamily="34" charset="0"/>
+                <a:latin typeface="Amiri" pitchFamily="2" charset="-78"/>
                 <a:ea typeface="Amiri" pitchFamily="2" charset="-78"/>
                 <a:cs typeface="Amiri" pitchFamily="2" charset="-78"/>
               </a:rPr>
@@ -3980,7 +3980,7 @@
                 <a:solidFill>
                   <a:srgbClr val="FFFFFF"/>
                 </a:solidFill>
-                <a:latin typeface="Calibri" pitchFamily="34" charset="0"/>
+                <a:latin typeface="Amiri" pitchFamily="2" charset="-78"/>
                 <a:ea typeface="Amiri" pitchFamily="2" charset="-78"/>
                 <a:cs typeface="Amiri" pitchFamily="2" charset="-78"/>
               </a:rPr>
@@ -4046,7 +4046,7 @@
                 <a:solidFill>
                   <a:srgbClr val="FFFFFF"/>
                 </a:solidFill>
-                <a:latin typeface="Calibri" pitchFamily="34" charset="0"/>
+                <a:latin typeface="Amiri" pitchFamily="2" charset="-78"/>
                 <a:ea typeface="Amiri" pitchFamily="2" charset="-78"/>
                 <a:cs typeface="Amiri" pitchFamily="2" charset="-78"/>
               </a:rPr>
@@ -4844,7 +4844,7 @@
                 <a:solidFill>
                   <a:srgbClr val="FFFFFF"/>
                 </a:solidFill>
-                <a:latin typeface="Calibri" pitchFamily="34" charset="0"/>
+                <a:latin typeface="Amiri" pitchFamily="2" charset="-78"/>
                 <a:ea typeface="Amiri" pitchFamily="2" charset="-78"/>
                 <a:cs typeface="Amiri" pitchFamily="2" charset="-78"/>
               </a:rPr>
@@ -4910,7 +4910,7 @@
                 <a:solidFill>
                   <a:srgbClr val="FFFFFF"/>
                 </a:solidFill>
-                <a:latin typeface="Calibri" pitchFamily="34" charset="0"/>
+                <a:latin typeface="Amiri" pitchFamily="2" charset="-78"/>
                 <a:ea typeface="Amiri" pitchFamily="2" charset="-78"/>
                 <a:cs typeface="Amiri" pitchFamily="2" charset="-78"/>
               </a:rPr>
@@ -4976,7 +4976,7 @@
                 <a:solidFill>
                   <a:srgbClr val="FFFFFF"/>
                 </a:solidFill>
-                <a:latin typeface="Calibri" pitchFamily="34" charset="0"/>
+                <a:latin typeface="Amiri" pitchFamily="2" charset="-78"/>
                 <a:ea typeface="Amiri" pitchFamily="2" charset="-78"/>
                 <a:cs typeface="Amiri" pitchFamily="2" charset="-78"/>
               </a:rPr>
@@ -5042,7 +5042,7 @@
                 <a:solidFill>
                   <a:srgbClr val="FFFFFF"/>
                 </a:solidFill>
-                <a:latin typeface="Calibri" pitchFamily="34" charset="0"/>
+                <a:latin typeface="Amiri" pitchFamily="2" charset="-78"/>
                 <a:ea typeface="Amiri" pitchFamily="2" charset="-78"/>
                 <a:cs typeface="Amiri" pitchFamily="2" charset="-78"/>
               </a:rPr>
@@ -8599,7 +8599,7 @@
                 <a:solidFill>
                   <a:srgbClr val="FFFFFF"/>
                 </a:solidFill>
-                <a:latin typeface="Calibri" pitchFamily="34" charset="0"/>
+                <a:latin typeface="Amiri" pitchFamily="2" charset="-78"/>
                 <a:ea typeface="Amiri" pitchFamily="2" charset="-78"/>
                 <a:cs typeface="Amiri" pitchFamily="2" charset="-78"/>
               </a:rPr>
@@ -8665,7 +8665,7 @@
                 <a:solidFill>
                   <a:srgbClr val="FFFFFF"/>
                 </a:solidFill>
-                <a:latin typeface="Calibri" pitchFamily="34" charset="0"/>
+                <a:latin typeface="Amiri" pitchFamily="2" charset="-78"/>
                 <a:ea typeface="Amiri" pitchFamily="2" charset="-78"/>
                 <a:cs typeface="Amiri" pitchFamily="2" charset="-78"/>
               </a:rPr>
@@ -8731,7 +8731,7 @@
                 <a:solidFill>
                   <a:srgbClr val="FFFFFF"/>
                 </a:solidFill>
-                <a:latin typeface="Calibri" pitchFamily="34" charset="0"/>
+                <a:latin typeface="Amiri" pitchFamily="2" charset="-78"/>
                 <a:ea typeface="Amiri" pitchFamily="2" charset="-78"/>
                 <a:cs typeface="Amiri" pitchFamily="2" charset="-78"/>
               </a:rPr>
@@ -8797,7 +8797,7 @@
                 <a:solidFill>
                   <a:srgbClr val="FFFFFF"/>
                 </a:solidFill>
-                <a:latin typeface="Calibri" pitchFamily="34" charset="0"/>
+                <a:latin typeface="Amiri" pitchFamily="2" charset="-78"/>
                 <a:ea typeface="Amiri" pitchFamily="2" charset="-78"/>
                 <a:cs typeface="Amiri" pitchFamily="2" charset="-78"/>
               </a:rPr>
@@ -9584,7 +9584,7 @@
                 <a:solidFill>
                   <a:srgbClr val="FFFFFF"/>
                 </a:solidFill>
-                <a:latin typeface="Calibri" pitchFamily="34" charset="0"/>
+                <a:latin typeface="Amiri" pitchFamily="2" charset="-78"/>
                 <a:ea typeface="Amiri" pitchFamily="2" charset="-78"/>
                 <a:cs typeface="Amiri" pitchFamily="2" charset="-78"/>
               </a:rPr>
@@ -9650,7 +9650,7 @@
                 <a:solidFill>
                   <a:srgbClr val="FFFFFF"/>
                 </a:solidFill>
-                <a:latin typeface="Calibri" pitchFamily="34" charset="0"/>
+                <a:latin typeface="Amiri" pitchFamily="2" charset="-78"/>
                 <a:ea typeface="Amiri" pitchFamily="2" charset="-78"/>
                 <a:cs typeface="Amiri" pitchFamily="2" charset="-78"/>
               </a:rPr>
@@ -9716,7 +9716,7 @@
                 <a:solidFill>
                   <a:srgbClr val="FFFFFF"/>
                 </a:solidFill>
-                <a:latin typeface="Calibri" pitchFamily="34" charset="0"/>
+                <a:latin typeface="Amiri" pitchFamily="2" charset="-78"/>
                 <a:ea typeface="Amiri" pitchFamily="2" charset="-78"/>
                 <a:cs typeface="Amiri" pitchFamily="2" charset="-78"/>
               </a:rPr>
@@ -9782,7 +9782,7 @@
                 <a:solidFill>
                   <a:srgbClr val="FFFFFF"/>
                 </a:solidFill>
-                <a:latin typeface="Calibri" pitchFamily="34" charset="0"/>
+                <a:latin typeface="Amiri" pitchFamily="2" charset="-78"/>
                 <a:ea typeface="Amiri" pitchFamily="2" charset="-78"/>
                 <a:cs typeface="Amiri" pitchFamily="2" charset="-78"/>
               </a:rPr>
@@ -10569,7 +10569,7 @@
                 <a:solidFill>
                   <a:srgbClr val="FFFFFF"/>
                 </a:solidFill>
-                <a:latin typeface="Calibri" pitchFamily="34" charset="0"/>
+                <a:latin typeface="Amiri" pitchFamily="2" charset="-78"/>
                 <a:ea typeface="Amiri" pitchFamily="2" charset="-78"/>
                 <a:cs typeface="Amiri" pitchFamily="2" charset="-78"/>
               </a:rPr>
@@ -10635,7 +10635,7 @@
                 <a:solidFill>
                   <a:srgbClr val="FFFFFF"/>
                 </a:solidFill>
-                <a:latin typeface="Calibri" pitchFamily="34" charset="0"/>
+                <a:latin typeface="Amiri" pitchFamily="2" charset="-78"/>
                 <a:ea typeface="Amiri" pitchFamily="2" charset="-78"/>
                 <a:cs typeface="Amiri" pitchFamily="2" charset="-78"/>
               </a:rPr>
@@ -10701,7 +10701,7 @@
                 <a:solidFill>
                   <a:srgbClr val="FFFFFF"/>
                 </a:solidFill>
-                <a:latin typeface="Calibri" pitchFamily="34" charset="0"/>
+                <a:latin typeface="Amiri" pitchFamily="2" charset="-78"/>
                 <a:ea typeface="Amiri" pitchFamily="2" charset="-78"/>
                 <a:cs typeface="Amiri" pitchFamily="2" charset="-78"/>
               </a:rPr>
@@ -10767,7 +10767,7 @@
                 <a:solidFill>
                   <a:srgbClr val="FFFFFF"/>
                 </a:solidFill>
-                <a:latin typeface="Calibri" pitchFamily="34" charset="0"/>
+                <a:latin typeface="Amiri" pitchFamily="2" charset="-78"/>
                 <a:ea typeface="Amiri" pitchFamily="2" charset="-78"/>
                 <a:cs typeface="Amiri" pitchFamily="2" charset="-78"/>
               </a:rPr>
